--- a/assets/powerpoints/module-n2-couloirs/C2-indiquer-le-chemin.pptx
+++ b/assets/powerpoints/module-n2-couloirs/C2-indiquer-le-chemin.pptx
@@ -12475,13 +12475,40 @@
               </a:lnSpc>
             </a:pPr>
             <a:r>
+              <a:rPr sz="2000" b="1" i="0">
+                <a:solidFill>
+                  <a:srgbClr val="4B4F52"/>
+                </a:solidFill>
+                <a:latin typeface="Verdana"/>
+              </a:rPr>
+              <a:t>Tout droit</a:t>
+            </a:r>
+            <a:r>
               <a:rPr sz="2000" b="0" i="0">
                 <a:solidFill>
                   <a:srgbClr val="4B4F52"/>
                 </a:solidFill>
                 <a:latin typeface="Verdana"/>
               </a:rPr>
-              <a:t>&lt;b&gt;Tout droit&lt;/b&gt;, c'est devant soi, sans tourner. &lt;b&gt;À droite&lt;/b&gt;, c'est un virage. Les deux expressions se ressemblent à l'oreille et s'échangent sans arrêt : le seul remède est de faire le geste en même temps que le mot, chaque fois.</a:t>
+              <a:t>, c'est devant soi, sans tourner. </a:t>
+            </a:r>
+            <a:r>
+              <a:rPr sz="2000" b="1" i="0">
+                <a:solidFill>
+                  <a:srgbClr val="4B4F52"/>
+                </a:solidFill>
+                <a:latin typeface="Verdana"/>
+              </a:rPr>
+              <a:t>À droite</a:t>
+            </a:r>
+            <a:r>
+              <a:rPr sz="2000" b="0" i="0">
+                <a:solidFill>
+                  <a:srgbClr val="4B4F52"/>
+                </a:solidFill>
+                <a:latin typeface="Verdana"/>
+              </a:rPr>
+              <a:t>, c'est un virage. Les deux expressions se ressemblent à l'oreille et s'échangent sans arrêt : le seul remède est de faire le geste en même temps que le mot, chaque fois.</a:t>
             </a:r>
           </a:p>
         </p:txBody>
